--- a/docs/Final_powerpoint.pptx
+++ b/docs/Final_powerpoint.pptx
@@ -5,7 +5,7 @@
     <p:sldMasterId id="2147483648" r:id="rId1"/>
   </p:sldMasterIdLst>
   <p:notesMasterIdLst>
-    <p:notesMasterId r:id="rId16"/>
+    <p:notesMasterId r:id="rId17"/>
   </p:notesMasterIdLst>
   <p:sldIdLst>
     <p:sldId id="256" r:id="rId2"/>
@@ -20,23 +20,25 @@
     <p:sldId id="264" r:id="rId11"/>
     <p:sldId id="267" r:id="rId12"/>
     <p:sldId id="266" r:id="rId13"/>
-    <p:sldId id="265" r:id="rId14"/>
-    <p:sldId id="269" r:id="rId15"/>
+    <p:sldId id="270" r:id="rId14"/>
+    <p:sldId id="265" r:id="rId15"/>
+    <p:sldId id="269" r:id="rId16"/>
   </p:sldIdLst>
   <p:sldSz cx="9144000" cy="5143500" type="screen16x9"/>
   <p:notesSz cx="5143500" cy="9144000"/>
   <p:embeddedFontLst>
     <p:embeddedFont>
-      <p:font typeface="Tomorrow" charset="0"/>
-      <p:regular r:id="rId17"/>
+      <p:font typeface="Tomorrow" pitchFamily="2" charset="0"/>
+      <p:regular r:id="rId18"/>
+      <p:bold r:id="rId19"/>
     </p:embeddedFont>
     <p:embeddedFont>
       <p:font typeface="Tomorrow Light" pitchFamily="2" charset="0"/>
-      <p:regular r:id="rId18"/>
+      <p:regular r:id="rId20"/>
     </p:embeddedFont>
     <p:embeddedFont>
       <p:font typeface="Tomorrow SemiBold" panose="020B0604020202020204" charset="0"/>
-      <p:regular r:id="rId19"/>
+      <p:regular r:id="rId21"/>
     </p:embeddedFont>
   </p:embeddedFontLst>
   <p:defaultTextStyle>
@@ -653,6 +655,114 @@
   <p:cSld>
     <p:spTree>
       <p:nvGrpSpPr>
+        <p:cNvPr id="1" name="">
+          <a:extLst>
+            <a:ext uri="{FF2B5EF4-FFF2-40B4-BE49-F238E27FC236}">
+              <a16:creationId xmlns:a16="http://schemas.microsoft.com/office/drawing/2014/main" id="{30CB69B9-04F2-E19B-AA7A-9BD8FF90CA27}"/>
+            </a:ext>
+          </a:extLst>
+        </p:cNvPr>
+        <p:cNvGrpSpPr/>
+        <p:nvPr/>
+      </p:nvGrpSpPr>
+      <p:grpSpPr>
+        <a:xfrm>
+          <a:off x="0" y="0"/>
+          <a:ext cx="0" cy="0"/>
+          <a:chOff x="0" y="0"/>
+          <a:chExt cx="0" cy="0"/>
+        </a:xfrm>
+      </p:grpSpPr>
+      <p:sp>
+        <p:nvSpPr>
+          <p:cNvPr id="2" name="Slide Image Placeholder 1">
+            <a:extLst>
+              <a:ext uri="{FF2B5EF4-FFF2-40B4-BE49-F238E27FC236}">
+                <a16:creationId xmlns:a16="http://schemas.microsoft.com/office/drawing/2014/main" id="{7E8A2992-431C-8D8C-B1E3-0050ACD5F0A3}"/>
+              </a:ext>
+            </a:extLst>
+          </p:cNvPr>
+          <p:cNvSpPr>
+            <a:spLocks noGrp="1" noRot="1" noChangeAspect="1"/>
+          </p:cNvSpPr>
+          <p:nvPr>
+            <p:ph type="sldImg"/>
+          </p:nvPr>
+        </p:nvSpPr>
+        <p:spPr/>
+      </p:sp>
+      <p:sp>
+        <p:nvSpPr>
+          <p:cNvPr id="3" name="Notes Placeholder 2">
+            <a:extLst>
+              <a:ext uri="{FF2B5EF4-FFF2-40B4-BE49-F238E27FC236}">
+                <a16:creationId xmlns:a16="http://schemas.microsoft.com/office/drawing/2014/main" id="{D73E0435-AB8B-DF88-195C-D6239A8F6372}"/>
+              </a:ext>
+            </a:extLst>
+          </p:cNvPr>
+          <p:cNvSpPr>
+            <a:spLocks noGrp="1"/>
+          </p:cNvSpPr>
+          <p:nvPr>
+            <p:ph type="body" idx="1"/>
+          </p:nvPr>
+        </p:nvSpPr>
+        <p:spPr/>
+        <p:txBody>
+          <a:bodyPr/>
+          <a:lstStyle/>
+          <a:p>
+            <a:endParaRPr lang="en-US" dirty="0"/>
+          </a:p>
+        </p:txBody>
+      </p:sp>
+      <p:sp>
+        <p:nvSpPr>
+          <p:cNvPr id="4" name="Slide Number Placeholder 3">
+            <a:extLst>
+              <a:ext uri="{FF2B5EF4-FFF2-40B4-BE49-F238E27FC236}">
+                <a16:creationId xmlns:a16="http://schemas.microsoft.com/office/drawing/2014/main" id="{0CFB5D11-05DE-F179-0C44-0B3F7F49E46F}"/>
+              </a:ext>
+            </a:extLst>
+          </p:cNvPr>
+          <p:cNvSpPr>
+            <a:spLocks noGrp="1"/>
+          </p:cNvSpPr>
+          <p:nvPr>
+            <p:ph type="sldNum" sz="quarter" idx="10"/>
+          </p:nvPr>
+        </p:nvSpPr>
+        <p:spPr/>
+        <p:txBody>
+          <a:bodyPr/>
+          <a:lstStyle/>
+          <a:p>
+            <a:fld id="{F7021451-1387-4CA6-816F-3879F97B5CBC}" type="slidenum">
+              <a:rPr lang="en-US"/>
+              <a:t>13</a:t>
+            </a:fld>
+            <a:endParaRPr lang="en-US"/>
+          </a:p>
+        </p:txBody>
+      </p:sp>
+    </p:spTree>
+    <p:extLst>
+      <p:ext uri="{BB962C8B-B14F-4D97-AF65-F5344CB8AC3E}">
+        <p14:creationId xmlns:p14="http://schemas.microsoft.com/office/powerpoint/2010/main" val="4194261311"/>
+      </p:ext>
+    </p:extLst>
+  </p:cSld>
+  <p:clrMapOvr>
+    <a:masterClrMapping/>
+  </p:clrMapOvr>
+</p:notes>
+</file>
+
+<file path=ppt/notesSlides/notesSlide14.xml><?xml version="1.0" encoding="utf-8"?>
+<p:notes xmlns:a="http://schemas.openxmlformats.org/drawingml/2006/main" xmlns:r="http://schemas.openxmlformats.org/officeDocument/2006/relationships" xmlns:p="http://schemas.openxmlformats.org/presentationml/2006/main">
+  <p:cSld>
+    <p:spTree>
+      <p:nvGrpSpPr>
         <p:cNvPr id="1" name=""/>
         <p:cNvGrpSpPr/>
         <p:nvPr/>
@@ -713,7 +823,7 @@
           <a:p>
             <a:fld id="{F7021451-1387-4CA6-816F-3879F97B5CBC}" type="slidenum">
               <a:rPr lang="en-US"/>
-              <a:t>13</a:t>
+              <a:t>14</a:t>
             </a:fld>
             <a:endParaRPr lang="en-US"/>
           </a:p>
@@ -732,7 +842,7 @@
 </p:notes>
 </file>
 
-<file path=ppt/notesSlides/notesSlide14.xml><?xml version="1.0" encoding="utf-8"?>
+<file path=ppt/notesSlides/notesSlide15.xml><?xml version="1.0" encoding="utf-8"?>
 <p:notes xmlns:a="http://schemas.openxmlformats.org/drawingml/2006/main" xmlns:r="http://schemas.openxmlformats.org/officeDocument/2006/relationships" xmlns:p="http://schemas.openxmlformats.org/presentationml/2006/main">
   <p:cSld>
     <p:spTree>
@@ -821,7 +931,7 @@
           <a:p>
             <a:fld id="{F7021451-1387-4CA6-816F-3879F97B5CBC}" type="slidenum">
               <a:rPr lang="en-US"/>
-              <a:t>14</a:t>
+              <a:t>15</a:t>
             </a:fld>
             <a:endParaRPr lang="en-US"/>
           </a:p>
@@ -2525,6 +2635,120 @@
 
 <file path=ppt/slides/slide13.xml><?xml version="1.0" encoding="utf-8"?>
 <p:sld xmlns:a="http://schemas.openxmlformats.org/drawingml/2006/main" xmlns:r="http://schemas.openxmlformats.org/officeDocument/2006/relationships" xmlns:p="http://schemas.openxmlformats.org/presentationml/2006/main">
+  <p:cSld>
+    <p:spTree>
+      <p:nvGrpSpPr>
+        <p:cNvPr id="1" name="">
+          <a:extLst>
+            <a:ext uri="{FF2B5EF4-FFF2-40B4-BE49-F238E27FC236}">
+              <a16:creationId xmlns:a16="http://schemas.microsoft.com/office/drawing/2014/main" id="{5435E261-35C3-CCBD-EF8B-2449FB29F954}"/>
+            </a:ext>
+          </a:extLst>
+        </p:cNvPr>
+        <p:cNvGrpSpPr/>
+        <p:nvPr/>
+      </p:nvGrpSpPr>
+      <p:grpSpPr>
+        <a:xfrm>
+          <a:off x="0" y="0"/>
+          <a:ext cx="0" cy="0"/>
+          <a:chOff x="0" y="0"/>
+          <a:chExt cx="0" cy="0"/>
+        </a:xfrm>
+      </p:grpSpPr>
+      <p:sp>
+        <p:nvSpPr>
+          <p:cNvPr id="2" name="Text 0">
+            <a:extLst>
+              <a:ext uri="{FF2B5EF4-FFF2-40B4-BE49-F238E27FC236}">
+                <a16:creationId xmlns:a16="http://schemas.microsoft.com/office/drawing/2014/main" id="{B4D36197-D03E-BC64-080C-491B0C4B9678}"/>
+              </a:ext>
+            </a:extLst>
+          </p:cNvPr>
+          <p:cNvSpPr/>
+          <p:nvPr/>
+        </p:nvSpPr>
+        <p:spPr>
+          <a:xfrm>
+            <a:off x="496119" y="298897"/>
+            <a:ext cx="6145927" cy="442987"/>
+          </a:xfrm>
+          <a:prstGeom prst="rect">
+            <a:avLst/>
+          </a:prstGeom>
+          <a:noFill/>
+          <a:ln/>
+        </p:spPr>
+        <p:txBody>
+          <a:bodyPr wrap="none" lIns="0" tIns="0" rIns="0" bIns="0" rtlCol="0" anchor="t"/>
+          <a:lstStyle/>
+          <a:p>
+            <a:pPr marL="0" indent="0" algn="l">
+              <a:lnSpc>
+                <a:spcPct val="104000"/>
+              </a:lnSpc>
+              <a:buNone/>
+            </a:pPr>
+            <a:r>
+              <a:rPr lang="en-US" sz="2750" dirty="0">
+                <a:solidFill>
+                  <a:srgbClr val="1D1D1B"/>
+                </a:solidFill>
+                <a:latin typeface="Tomorrow SemiBold" pitchFamily="34" charset="0"/>
+                <a:ea typeface="Tomorrow SemiBold" pitchFamily="34" charset="-122"/>
+                <a:cs typeface="Tomorrow SemiBold" pitchFamily="34" charset="-120"/>
+              </a:rPr>
+              <a:t>Slide 12 – Dashboard Screenshots</a:t>
+            </a:r>
+            <a:endParaRPr lang="en-US" sz="2750" dirty="0"/>
+          </a:p>
+        </p:txBody>
+      </p:sp>
+      <p:pic>
+        <p:nvPicPr>
+          <p:cNvPr id="5" name="Picture 4">
+            <a:extLst>
+              <a:ext uri="{FF2B5EF4-FFF2-40B4-BE49-F238E27FC236}">
+                <a16:creationId xmlns:a16="http://schemas.microsoft.com/office/drawing/2014/main" id="{58338FFE-269D-EDFB-C9F1-B41A085411C3}"/>
+              </a:ext>
+            </a:extLst>
+          </p:cNvPr>
+          <p:cNvPicPr>
+            <a:picLocks noChangeAspect="1"/>
+          </p:cNvPicPr>
+          <p:nvPr/>
+        </p:nvPicPr>
+        <p:blipFill>
+          <a:blip r:embed="rId3"/>
+          <a:stretch>
+            <a:fillRect/>
+          </a:stretch>
+        </p:blipFill>
+        <p:spPr>
+          <a:xfrm>
+            <a:off x="1289896" y="1163624"/>
+            <a:ext cx="6052541" cy="2878507"/>
+          </a:xfrm>
+          <a:prstGeom prst="rect">
+            <a:avLst/>
+          </a:prstGeom>
+        </p:spPr>
+      </p:pic>
+    </p:spTree>
+    <p:extLst>
+      <p:ext uri="{BB962C8B-B14F-4D97-AF65-F5344CB8AC3E}">
+        <p14:creationId xmlns:p14="http://schemas.microsoft.com/office/powerpoint/2010/main" val="4005455576"/>
+      </p:ext>
+    </p:extLst>
+  </p:cSld>
+  <p:clrMapOvr>
+    <a:masterClrMapping/>
+  </p:clrMapOvr>
+</p:sld>
+</file>
+
+<file path=ppt/slides/slide14.xml><?xml version="1.0" encoding="utf-8"?>
+<p:sld xmlns:a="http://schemas.openxmlformats.org/drawingml/2006/main" xmlns:r="http://schemas.openxmlformats.org/officeDocument/2006/relationships" xmlns:p="http://schemas.openxmlformats.org/presentationml/2006/main">
   <p:cSld name="Slide 10">
     <p:spTree>
       <p:nvGrpSpPr>
@@ -3086,7 +3310,7 @@
 </p:sld>
 </file>
 
-<file path=ppt/slides/slide14.xml><?xml version="1.0" encoding="utf-8"?>
+<file path=ppt/slides/slide15.xml><?xml version="1.0" encoding="utf-8"?>
 <p:sld xmlns:a="http://schemas.openxmlformats.org/drawingml/2006/main" xmlns:r="http://schemas.openxmlformats.org/officeDocument/2006/relationships" xmlns:p="http://schemas.openxmlformats.org/presentationml/2006/main">
   <p:cSld>
     <p:spTree>
